--- a/lectures/lecture01.pptx
+++ b/lectures/lecture01.pptx
@@ -25968,7 +25968,26 @@
                 </a:solidFill>
                 <a:latin typeface="Arial"/>
               </a:rPr>
-              <a:t>github.com/rustam-azimov/ ml-course-spbu</a:t>
+              <a:t>github.com/rustam-azimov/</a:t>
+            </a:r>
+          </a:p>
+          <a:p>
+            <a:pPr algn="ctr">
+              <a:lnSpc>
+                <a:spcPct val="120000"/>
+              </a:lnSpc>
+              <a:spcAft>
+                <a:spcPts val="400"/>
+              </a:spcAft>
+            </a:pPr>
+            <a:r>
+              <a:rPr sz="1600" b="0" i="0">
+                <a:solidFill>
+                  <a:srgbClr val="181D27"/>
+                </a:solidFill>
+                <a:latin typeface="Arial"/>
+              </a:rPr>
+              <a:t>ml-course-spbu</a:t>
             </a:r>
           </a:p>
         </p:txBody>
